--- a/Planning docs/Slides/lesson-26-1-teacher-slides.pptx
+++ b/Planning docs/Slides/lesson-26-1-teacher-slides.pptx
@@ -517,7 +517,7 @@
           <a:p>
             <a:r>
               <a:rPr lang="en-US" dirty="0"/>
-              <a:t>Lesson 26.1. Reading: Reading: Ch. 4–6.</a:t>
+              <a:t>Lesson 26.1. Reading: .</a:t>
             </a:r>
             <a:endParaRPr lang="en-US" dirty="0"/>
           </a:p>
@@ -2321,7 +2321,7 @@
                 <a:ea typeface="Calibri" pitchFamily="34" charset="-122"/>
                 <a:cs typeface="Calibri" pitchFamily="34" charset="-120"/>
               </a:rPr>
-              <a:t>Lesson 26.1  ·  Reading: Ch. 4–6</a:t>
+              <a:t>Lesson 26.1</a:t>
             </a:r>
             <a:endParaRPr lang="en-US" sz="2000" dirty="0"/>
           </a:p>
@@ -4700,121 +4700,9 @@
                 <a:ea typeface="Calibri" pitchFamily="34" charset="-122"/>
                 <a:cs typeface="Calibri" pitchFamily="34" charset="-120"/>
               </a:rPr>
-              <a:t>Reading: Ch. 4–6</a:t>
+              <a:t>Today’s chapters</a:t>
             </a:r>
             <a:endParaRPr lang="en-US" sz="2600" dirty="0"/>
-          </a:p>
-        </p:txBody>
-      </p:sp>
-      <p:sp>
-        <p:nvSpPr>
-          <p:cNvPr id="5" name="Text 3"/>
-          <p:cNvSpPr/>
-          <p:nvPr/>
-        </p:nvSpPr>
-        <p:spPr>
-          <a:xfrm>
-            <a:off x="365760" y="1463040"/>
-            <a:ext cx="8229600" cy="237744"/>
-          </a:xfrm>
-          <a:prstGeom prst="rect">
-            <a:avLst/>
-          </a:prstGeom>
-          <a:noFill/>
-          <a:ln/>
-        </p:spPr>
-        <p:txBody>
-          <a:bodyPr wrap="square" lIns="0" tIns="0" rIns="0" bIns="0" rtlCol="0" anchor="ctr"/>
-          <a:lstStyle/>
-          <a:p>
-            <a:pPr indent="0" marL="0">
-              <a:buNone/>
-            </a:pPr>
-            <a:r>
-              <a:rPr lang="en-US" sz="1100" b="1" spc="100" kern="0" dirty="0">
-                <a:solidFill>
-                  <a:srgbClr val="C7922C"/>
-                </a:solidFill>
-                <a:latin typeface="Calibri" pitchFamily="34" charset="0"/>
-                <a:ea typeface="Calibri" pitchFamily="34" charset="-122"/>
-                <a:cs typeface="Calibri" pitchFamily="34" charset="-120"/>
-              </a:rPr>
-              <a:t>PAUSE &amp; THINK</a:t>
-            </a:r>
-            <a:endParaRPr lang="en-US" sz="1100" dirty="0"/>
-          </a:p>
-        </p:txBody>
-      </p:sp>
-      <p:sp>
-        <p:nvSpPr>
-          <p:cNvPr id="6" name="Text 4"/>
-          <p:cNvSpPr/>
-          <p:nvPr/>
-        </p:nvSpPr>
-        <p:spPr>
-          <a:xfrm>
-            <a:off x="365760" y="1719072"/>
-            <a:ext cx="8412480" cy="914400"/>
-          </a:xfrm>
-          <a:prstGeom prst="rect">
-            <a:avLst/>
-          </a:prstGeom>
-          <a:noFill/>
-          <a:ln/>
-        </p:spPr>
-        <p:txBody>
-          <a:bodyPr wrap="square" lIns="0" tIns="0" rIns="0" bIns="0" rtlCol="0" anchor="ctr"/>
-          <a:lstStyle/>
-          <a:p>
-            <a:pPr indent="0" marL="0">
-              <a:buNone/>
-            </a:pPr>
-            <a:r>
-              <a:rPr lang="en-US" sz="1500" dirty="0">
-                <a:solidFill>
-                  <a:srgbClr val="1E293B"/>
-                </a:solidFill>
-                <a:latin typeface="Calibri" pitchFamily="34" charset="0"/>
-                <a:ea typeface="Calibri" pitchFamily="34" charset="-122"/>
-                <a:cs typeface="Calibri" pitchFamily="34" charset="-120"/>
-              </a:rPr>
-              <a:t>•  Track choices and consequences.</a:t>
-            </a:r>
-            <a:endParaRPr lang="en-US" sz="1500" dirty="0"/>
-          </a:p>
-          <a:p>
-            <a:pPr indent="0" marL="0">
-              <a:buNone/>
-            </a:pPr>
-            <a:r>
-              <a:rPr lang="en-US" sz="1500" dirty="0">
-                <a:solidFill>
-                  <a:srgbClr val="1E293B"/>
-                </a:solidFill>
-                <a:latin typeface="Calibri" pitchFamily="34" charset="0"/>
-                <a:ea typeface="Calibri" pitchFamily="34" charset="-122"/>
-                <a:cs typeface="Calibri" pitchFamily="34" charset="-120"/>
-              </a:rPr>
-              <a:t>•  As you read today, ask yourself: Why do people sometimes make choices they know are wrong?</a:t>
-            </a:r>
-            <a:endParaRPr lang="en-US" sz="1500" dirty="0"/>
-          </a:p>
-          <a:p>
-            <a:pPr indent="0" marL="0">
-              <a:buNone/>
-            </a:pPr>
-            <a:r>
-              <a:rPr lang="en-US" sz="1500" dirty="0">
-                <a:solidFill>
-                  <a:srgbClr val="1E293B"/>
-                </a:solidFill>
-                <a:latin typeface="Calibri" pitchFamily="34" charset="0"/>
-                <a:ea typeface="Calibri" pitchFamily="34" charset="-122"/>
-                <a:cs typeface="Calibri" pitchFamily="34" charset="-120"/>
-              </a:rPr>
-              <a:t>•  What does Edmund choose to do at the end of Ch. 4? What does the narrator tell us about the Turkish Delight that makes his choice so dangerous?</a:t>
-            </a:r>
-            <a:endParaRPr lang="en-US" sz="1500" dirty="0"/>
           </a:p>
         </p:txBody>
       </p:sp>
@@ -5923,13 +5811,13 @@
             <a:r>
               <a:rPr lang="en-US" sz="1100" b="1" spc="100" kern="0" dirty="0">
                 <a:solidFill>
-                  <a:srgbClr val="8B6FC0"/>
-                </a:solidFill>
-                <a:latin typeface="Calibri" pitchFamily="34" charset="0"/>
-                <a:ea typeface="Calibri" pitchFamily="34" charset="-122"/>
-                <a:cs typeface="Calibri" pitchFamily="34" charset="-120"/>
-              </a:rPr>
-              <a:t>READING</a:t>
+                  <a:srgbClr val="C7922C"/>
+                </a:solidFill>
+                <a:latin typeface="Calibri" pitchFamily="34" charset="0"/>
+                <a:ea typeface="Calibri" pitchFamily="34" charset="-122"/>
+                <a:cs typeface="Calibri" pitchFamily="34" charset="-120"/>
+              </a:rPr>
+              <a:t>BIG QUESTION</a:t>
             </a:r>
             <a:endParaRPr lang="en-US" sz="1100" dirty="0"/>
           </a:p>
@@ -5937,91 +5825,13 @@
       </p:sp>
       <p:sp>
         <p:nvSpPr>
-          <p:cNvPr id="5" name="Text 3"/>
+          <p:cNvPr id="5" name="Shape 3"/>
           <p:cNvSpPr/>
           <p:nvPr/>
         </p:nvSpPr>
         <p:spPr>
           <a:xfrm>
             <a:off x="365760" y="1014984"/>
-            <a:ext cx="8412480" cy="365760"/>
-          </a:xfrm>
-          <a:prstGeom prst="rect">
-            <a:avLst/>
-          </a:prstGeom>
-          <a:noFill/>
-          <a:ln/>
-        </p:spPr>
-        <p:txBody>
-          <a:bodyPr wrap="square" lIns="0" tIns="0" rIns="0" bIns="0" rtlCol="0" anchor="ctr"/>
-          <a:lstStyle/>
-          <a:p>
-            <a:pPr indent="0" marL="0">
-              <a:buNone/>
-            </a:pPr>
-            <a:r>
-              <a:rPr lang="en-US" sz="2000" b="1" dirty="0">
-                <a:solidFill>
-                  <a:srgbClr val="0E1C42"/>
-                </a:solidFill>
-                <a:latin typeface="Calibri" pitchFamily="34" charset="0"/>
-                <a:ea typeface="Calibri" pitchFamily="34" charset="-122"/>
-                <a:cs typeface="Calibri" pitchFamily="34" charset="-120"/>
-              </a:rPr>
-              <a:t>Reading: Ch. 4–6</a:t>
-            </a:r>
-            <a:endParaRPr lang="en-US" sz="2000" dirty="0"/>
-          </a:p>
-        </p:txBody>
-      </p:sp>
-      <p:sp>
-        <p:nvSpPr>
-          <p:cNvPr id="6" name="Text 4"/>
-          <p:cNvSpPr/>
-          <p:nvPr/>
-        </p:nvSpPr>
-        <p:spPr>
-          <a:xfrm>
-            <a:off x="365760" y="1508760"/>
-            <a:ext cx="8229600" cy="237744"/>
-          </a:xfrm>
-          <a:prstGeom prst="rect">
-            <a:avLst/>
-          </a:prstGeom>
-          <a:noFill/>
-          <a:ln/>
-        </p:spPr>
-        <p:txBody>
-          <a:bodyPr wrap="square" lIns="0" tIns="0" rIns="0" bIns="0" rtlCol="0" anchor="ctr"/>
-          <a:lstStyle/>
-          <a:p>
-            <a:pPr indent="0" marL="0">
-              <a:buNone/>
-            </a:pPr>
-            <a:r>
-              <a:rPr lang="en-US" sz="1100" b="1" spc="100" kern="0" dirty="0">
-                <a:solidFill>
-                  <a:srgbClr val="C7922C"/>
-                </a:solidFill>
-                <a:latin typeface="Calibri" pitchFamily="34" charset="0"/>
-                <a:ea typeface="Calibri" pitchFamily="34" charset="-122"/>
-                <a:cs typeface="Calibri" pitchFamily="34" charset="-120"/>
-              </a:rPr>
-              <a:t>BIG QUESTION</a:t>
-            </a:r>
-            <a:endParaRPr lang="en-US" sz="1100" dirty="0"/>
-          </a:p>
-        </p:txBody>
-      </p:sp>
-      <p:sp>
-        <p:nvSpPr>
-          <p:cNvPr id="7" name="Shape 5"/>
-          <p:cNvSpPr/>
-          <p:nvPr/>
-        </p:nvSpPr>
-        <p:spPr>
-          <a:xfrm>
-            <a:off x="365760" y="1746504"/>
             <a:ext cx="8412480" cy="731520"/>
           </a:xfrm>
           <a:prstGeom prst="roundRect">
@@ -6049,91 +5859,91 @@
       </p:sp>
       <p:sp>
         <p:nvSpPr>
+          <p:cNvPr id="6" name="Text 4"/>
+          <p:cNvSpPr/>
+          <p:nvPr/>
+        </p:nvSpPr>
+        <p:spPr>
+          <a:xfrm>
+            <a:off x="594360" y="1143000"/>
+            <a:ext cx="7955280" cy="475488"/>
+          </a:xfrm>
+          <a:prstGeom prst="rect">
+            <a:avLst/>
+          </a:prstGeom>
+          <a:noFill/>
+          <a:ln/>
+        </p:spPr>
+        <p:txBody>
+          <a:bodyPr wrap="square" lIns="0" tIns="0" rIns="0" bIns="0" rtlCol="0" anchor="ctr"/>
+          <a:lstStyle/>
+          <a:p>
+            <a:pPr indent="0" marL="0">
+              <a:buNone/>
+            </a:pPr>
+            <a:r>
+              <a:rPr lang="en-US" sz="1700" dirty="0">
+                <a:solidFill>
+                  <a:srgbClr val="1E293B"/>
+                </a:solidFill>
+                <a:latin typeface="Calibri" pitchFamily="34" charset="0"/>
+                <a:ea typeface="Calibri" pitchFamily="34" charset="-122"/>
+                <a:cs typeface="Calibri" pitchFamily="34" charset="-120"/>
+              </a:rPr>
+              <a:t>Track choices and consequences.</a:t>
+            </a:r>
+            <a:endParaRPr lang="en-US" sz="1700" dirty="0"/>
+          </a:p>
+        </p:txBody>
+      </p:sp>
+      <p:sp>
+        <p:nvSpPr>
+          <p:cNvPr id="7" name="Text 5"/>
+          <p:cNvSpPr/>
+          <p:nvPr/>
+        </p:nvSpPr>
+        <p:spPr>
+          <a:xfrm>
+            <a:off x="365760" y="1874520"/>
+            <a:ext cx="8229600" cy="237744"/>
+          </a:xfrm>
+          <a:prstGeom prst="rect">
+            <a:avLst/>
+          </a:prstGeom>
+          <a:noFill/>
+          <a:ln/>
+        </p:spPr>
+        <p:txBody>
+          <a:bodyPr wrap="square" lIns="0" tIns="0" rIns="0" bIns="0" rtlCol="0" anchor="ctr"/>
+          <a:lstStyle/>
+          <a:p>
+            <a:pPr indent="0" marL="0">
+              <a:buNone/>
+            </a:pPr>
+            <a:r>
+              <a:rPr lang="en-US" sz="1100" b="1" spc="100" kern="0" dirty="0">
+                <a:solidFill>
+                  <a:srgbClr val="55C8E8"/>
+                </a:solidFill>
+                <a:latin typeface="Calibri" pitchFamily="34" charset="0"/>
+                <a:ea typeface="Calibri" pitchFamily="34" charset="-122"/>
+                <a:cs typeface="Calibri" pitchFamily="34" charset="-120"/>
+              </a:rPr>
+              <a:t>READING LENS</a:t>
+            </a:r>
+            <a:endParaRPr lang="en-US" sz="1100" dirty="0"/>
+          </a:p>
+        </p:txBody>
+      </p:sp>
+      <p:sp>
+        <p:nvSpPr>
           <p:cNvPr id="8" name="Text 6"/>
           <p:cNvSpPr/>
           <p:nvPr/>
         </p:nvSpPr>
         <p:spPr>
           <a:xfrm>
-            <a:off x="594360" y="1874520"/>
-            <a:ext cx="7955280" cy="475488"/>
-          </a:xfrm>
-          <a:prstGeom prst="rect">
-            <a:avLst/>
-          </a:prstGeom>
-          <a:noFill/>
-          <a:ln/>
-        </p:spPr>
-        <p:txBody>
-          <a:bodyPr wrap="square" lIns="0" tIns="0" rIns="0" bIns="0" rtlCol="0" anchor="ctr"/>
-          <a:lstStyle/>
-          <a:p>
-            <a:pPr indent="0" marL="0">
-              <a:buNone/>
-            </a:pPr>
-            <a:r>
-              <a:rPr lang="en-US" sz="1700" dirty="0">
-                <a:solidFill>
-                  <a:srgbClr val="1E293B"/>
-                </a:solidFill>
-                <a:latin typeface="Calibri" pitchFamily="34" charset="0"/>
-                <a:ea typeface="Calibri" pitchFamily="34" charset="-122"/>
-                <a:cs typeface="Calibri" pitchFamily="34" charset="-120"/>
-              </a:rPr>
-              <a:t>Track choices and consequences.</a:t>
-            </a:r>
-            <a:endParaRPr lang="en-US" sz="1700" dirty="0"/>
-          </a:p>
-        </p:txBody>
-      </p:sp>
-      <p:sp>
-        <p:nvSpPr>
-          <p:cNvPr id="9" name="Text 7"/>
-          <p:cNvSpPr/>
-          <p:nvPr/>
-        </p:nvSpPr>
-        <p:spPr>
-          <a:xfrm>
-            <a:off x="365760" y="2606040"/>
-            <a:ext cx="8229600" cy="237744"/>
-          </a:xfrm>
-          <a:prstGeom prst="rect">
-            <a:avLst/>
-          </a:prstGeom>
-          <a:noFill/>
-          <a:ln/>
-        </p:spPr>
-        <p:txBody>
-          <a:bodyPr wrap="square" lIns="0" tIns="0" rIns="0" bIns="0" rtlCol="0" anchor="ctr"/>
-          <a:lstStyle/>
-          <a:p>
-            <a:pPr indent="0" marL="0">
-              <a:buNone/>
-            </a:pPr>
-            <a:r>
-              <a:rPr lang="en-US" sz="1100" b="1" spc="100" kern="0" dirty="0">
-                <a:solidFill>
-                  <a:srgbClr val="55C8E8"/>
-                </a:solidFill>
-                <a:latin typeface="Calibri" pitchFamily="34" charset="0"/>
-                <a:ea typeface="Calibri" pitchFamily="34" charset="-122"/>
-                <a:cs typeface="Calibri" pitchFamily="34" charset="-120"/>
-              </a:rPr>
-              <a:t>READING LENS</a:t>
-            </a:r>
-            <a:endParaRPr lang="en-US" sz="1100" dirty="0"/>
-          </a:p>
-        </p:txBody>
-      </p:sp>
-      <p:sp>
-        <p:nvSpPr>
-          <p:cNvPr id="10" name="Text 8"/>
-          <p:cNvSpPr/>
-          <p:nvPr/>
-        </p:nvSpPr>
-        <p:spPr>
-          <a:xfrm>
-            <a:off x="365760" y="2843784"/>
+            <a:off x="365760" y="2112264"/>
             <a:ext cx="8412480" cy="914400"/>
           </a:xfrm>
           <a:prstGeom prst="rect">
